--- a/src/outline2pptx/templates/warm.pptx
+++ b/src/outline2pptx/templates/warm.pptx
@@ -198,8 +198,8 @@
         </p:nvSpPr>
         <p:spPr>
           <a:xfrm>
-            <a:off x="812800" y="0"/>
-            <a:ext cx="3793066" cy="0"/>
+            <a:off x="640080" y="6200000"/>
+            <a:ext cx="3500000" cy="400050"/>
           </a:xfrm>
         </p:spPr>
         <p:txBody>
@@ -226,8 +226,8 @@
         </p:nvSpPr>
         <p:spPr>
           <a:xfrm>
-            <a:off x="5554133" y="0"/>
-            <a:ext cx="5147733" cy="0"/>
+            <a:off x="4346000" y="6200000"/>
+            <a:ext cx="3500000" cy="400050"/>
           </a:xfrm>
         </p:spPr>
         <p:txBody>
@@ -250,8 +250,8 @@
         </p:nvSpPr>
         <p:spPr>
           <a:xfrm>
-            <a:off x="11650133" y="0"/>
-            <a:ext cx="3793066" cy="0"/>
+            <a:off x="8051920" y="6200000"/>
+            <a:ext cx="3500000" cy="400050"/>
           </a:xfrm>
         </p:spPr>
         <p:txBody>
@@ -401,8 +401,8 @@
         </p:nvSpPr>
         <p:spPr>
           <a:xfrm>
-            <a:off x="812800" y="0"/>
-            <a:ext cx="3793066" cy="0"/>
+            <a:off x="640080" y="6200000"/>
+            <a:ext cx="3500000" cy="400050"/>
           </a:xfrm>
         </p:spPr>
         <p:txBody>
@@ -429,8 +429,8 @@
         </p:nvSpPr>
         <p:spPr>
           <a:xfrm>
-            <a:off x="5554133" y="0"/>
-            <a:ext cx="5147733" cy="0"/>
+            <a:off x="4346000" y="6200000"/>
+            <a:ext cx="3500000" cy="400050"/>
           </a:xfrm>
         </p:spPr>
         <p:txBody>
@@ -453,8 +453,8 @@
         </p:nvSpPr>
         <p:spPr>
           <a:xfrm>
-            <a:off x="11650133" y="0"/>
-            <a:ext cx="3793066" cy="0"/>
+            <a:off x="8051920" y="6200000"/>
+            <a:ext cx="3500000" cy="400050"/>
           </a:xfrm>
         </p:spPr>
         <p:txBody>
@@ -604,8 +604,8 @@
         </p:nvSpPr>
         <p:spPr>
           <a:xfrm>
-            <a:off x="812800" y="0"/>
-            <a:ext cx="3793066" cy="0"/>
+            <a:off x="640080" y="6200000"/>
+            <a:ext cx="3500000" cy="400050"/>
           </a:xfrm>
         </p:spPr>
         <p:txBody>
@@ -632,8 +632,8 @@
         </p:nvSpPr>
         <p:spPr>
           <a:xfrm>
-            <a:off x="5554133" y="0"/>
-            <a:ext cx="5147733" cy="0"/>
+            <a:off x="4346000" y="6200000"/>
+            <a:ext cx="3500000" cy="400050"/>
           </a:xfrm>
         </p:spPr>
         <p:txBody>
@@ -656,8 +656,8 @@
         </p:nvSpPr>
         <p:spPr>
           <a:xfrm>
-            <a:off x="11650133" y="0"/>
-            <a:ext cx="3793066" cy="0"/>
+            <a:off x="8051920" y="6200000"/>
+            <a:ext cx="3500000" cy="400050"/>
           </a:xfrm>
         </p:spPr>
         <p:txBody>
@@ -746,8 +746,8 @@
         </p:nvSpPr>
         <p:spPr>
           <a:xfrm>
-            <a:off x="812800" y="0"/>
-            <a:ext cx="3793066" cy="0"/>
+            <a:off x="640080" y="6200000"/>
+            <a:ext cx="3500000" cy="400050"/>
           </a:xfrm>
         </p:spPr>
         <p:txBody>
@@ -774,8 +774,8 @@
         </p:nvSpPr>
         <p:spPr>
           <a:xfrm>
-            <a:off x="5554133" y="0"/>
-            <a:ext cx="5147733" cy="0"/>
+            <a:off x="4346000" y="6200000"/>
+            <a:ext cx="3500000" cy="400050"/>
           </a:xfrm>
         </p:spPr>
         <p:txBody>
@@ -798,8 +798,8 @@
         </p:nvSpPr>
         <p:spPr>
           <a:xfrm>
-            <a:off x="11650133" y="0"/>
-            <a:ext cx="3793066" cy="0"/>
+            <a:off x="8051920" y="6200000"/>
+            <a:ext cx="3500000" cy="400050"/>
           </a:xfrm>
         </p:spPr>
         <p:txBody>
@@ -1010,8 +1010,8 @@
         </p:nvSpPr>
         <p:spPr>
           <a:xfrm>
-            <a:off x="812800" y="0"/>
-            <a:ext cx="3793066" cy="0"/>
+            <a:off x="640080" y="6200000"/>
+            <a:ext cx="3500000" cy="400050"/>
           </a:xfrm>
         </p:spPr>
         <p:txBody>
@@ -1038,8 +1038,8 @@
         </p:nvSpPr>
         <p:spPr>
           <a:xfrm>
-            <a:off x="5554133" y="0"/>
-            <a:ext cx="5147733" cy="0"/>
+            <a:off x="4346000" y="6200000"/>
+            <a:ext cx="3500000" cy="400050"/>
           </a:xfrm>
         </p:spPr>
         <p:txBody>
@@ -1062,8 +1062,8 @@
         </p:nvSpPr>
         <p:spPr>
           <a:xfrm>
-            <a:off x="11650133" y="0"/>
-            <a:ext cx="3793066" cy="0"/>
+            <a:off x="8051920" y="6200000"/>
+            <a:ext cx="3500000" cy="400050"/>
           </a:xfrm>
         </p:spPr>
         <p:txBody>
@@ -1338,8 +1338,8 @@
         </p:nvSpPr>
         <p:spPr>
           <a:xfrm>
-            <a:off x="812800" y="0"/>
-            <a:ext cx="3793066" cy="0"/>
+            <a:off x="640080" y="6200000"/>
+            <a:ext cx="3500000" cy="400050"/>
           </a:xfrm>
         </p:spPr>
         <p:txBody>
@@ -1366,8 +1366,8 @@
         </p:nvSpPr>
         <p:spPr>
           <a:xfrm>
-            <a:off x="5554133" y="0"/>
-            <a:ext cx="5147733" cy="0"/>
+            <a:off x="4346000" y="6200000"/>
+            <a:ext cx="3500000" cy="400050"/>
           </a:xfrm>
         </p:spPr>
         <p:txBody>
@@ -1390,8 +1390,8 @@
         </p:nvSpPr>
         <p:spPr>
           <a:xfrm>
-            <a:off x="11650133" y="0"/>
-            <a:ext cx="3793066" cy="0"/>
+            <a:off x="8051920" y="6200000"/>
+            <a:ext cx="3500000" cy="400050"/>
           </a:xfrm>
         </p:spPr>
         <p:txBody>
@@ -1480,8 +1480,8 @@
         </p:nvSpPr>
         <p:spPr>
           <a:xfrm>
-            <a:off x="812800" y="0"/>
-            <a:ext cx="3793066" cy="0"/>
+            <a:off x="640080" y="6200000"/>
+            <a:ext cx="3500000" cy="400050"/>
           </a:xfrm>
         </p:spPr>
         <p:txBody>
@@ -1508,8 +1508,8 @@
         </p:nvSpPr>
         <p:spPr>
           <a:xfrm>
-            <a:off x="5554133" y="0"/>
-            <a:ext cx="5147733" cy="0"/>
+            <a:off x="4346000" y="6200000"/>
+            <a:ext cx="3500000" cy="400050"/>
           </a:xfrm>
         </p:spPr>
         <p:txBody>
@@ -1532,8 +1532,8 @@
         </p:nvSpPr>
         <p:spPr>
           <a:xfrm>
-            <a:off x="11650133" y="0"/>
-            <a:ext cx="3793066" cy="0"/>
+            <a:off x="8051920" y="6200000"/>
+            <a:ext cx="3500000" cy="400050"/>
           </a:xfrm>
         </p:spPr>
         <p:txBody>
@@ -1683,8 +1683,8 @@
         </p:nvSpPr>
         <p:spPr>
           <a:xfrm>
-            <a:off x="812800" y="0"/>
-            <a:ext cx="3793066" cy="0"/>
+            <a:off x="640080" y="6200000"/>
+            <a:ext cx="3500000" cy="400050"/>
           </a:xfrm>
         </p:spPr>
         <p:txBody>
@@ -1711,8 +1711,8 @@
         </p:nvSpPr>
         <p:spPr>
           <a:xfrm>
-            <a:off x="5554133" y="0"/>
-            <a:ext cx="5147733" cy="0"/>
+            <a:off x="4346000" y="6200000"/>
+            <a:ext cx="3500000" cy="400050"/>
           </a:xfrm>
         </p:spPr>
         <p:txBody>
@@ -1735,8 +1735,8 @@
         </p:nvSpPr>
         <p:spPr>
           <a:xfrm>
-            <a:off x="11650133" y="0"/>
-            <a:ext cx="3793066" cy="0"/>
+            <a:off x="8051920" y="6200000"/>
+            <a:ext cx="3500000" cy="400050"/>
           </a:xfrm>
         </p:spPr>
         <p:txBody>
@@ -1918,8 +1918,8 @@
         </p:nvSpPr>
         <p:spPr>
           <a:xfrm>
-            <a:off x="812800" y="0"/>
-            <a:ext cx="3793066" cy="0"/>
+            <a:off x="640080" y="6200000"/>
+            <a:ext cx="3500000" cy="400050"/>
           </a:xfrm>
         </p:spPr>
         <p:txBody>
@@ -1946,8 +1946,8 @@
         </p:nvSpPr>
         <p:spPr>
           <a:xfrm>
-            <a:off x="5554133" y="0"/>
-            <a:ext cx="5147733" cy="0"/>
+            <a:off x="4346000" y="6200000"/>
+            <a:ext cx="3500000" cy="400050"/>
           </a:xfrm>
         </p:spPr>
         <p:txBody>
@@ -1970,8 +1970,8 @@
         </p:nvSpPr>
         <p:spPr>
           <a:xfrm>
-            <a:off x="11650133" y="0"/>
-            <a:ext cx="3793066" cy="0"/>
+            <a:off x="8051920" y="6200000"/>
+            <a:ext cx="3500000" cy="400050"/>
           </a:xfrm>
         </p:spPr>
         <p:txBody>
@@ -2128,8 +2128,8 @@
         </p:nvSpPr>
         <p:spPr>
           <a:xfrm>
-            <a:off x="609600" y="6356350"/>
-            <a:ext cx="2844800" cy="365125"/>
+            <a:off x="640080" y="6200000"/>
+            <a:ext cx="3500000" cy="400050"/>
           </a:xfrm>
           <a:prstGeom prst="rect">
             <a:avLst/>
@@ -2169,8 +2169,8 @@
         </p:nvSpPr>
         <p:spPr>
           <a:xfrm>
-            <a:off x="4165600" y="6356350"/>
-            <a:ext cx="3860800" cy="365125"/>
+            <a:off x="4346000" y="6200000"/>
+            <a:ext cx="3500000" cy="400050"/>
           </a:xfrm>
           <a:prstGeom prst="rect">
             <a:avLst/>
@@ -2206,8 +2206,8 @@
         </p:nvSpPr>
         <p:spPr>
           <a:xfrm>
-            <a:off x="8737600" y="6356350"/>
-            <a:ext cx="2844800" cy="365125"/>
+            <a:off x="8051920" y="6200000"/>
+            <a:ext cx="3500000" cy="400050"/>
           </a:xfrm>
           <a:prstGeom prst="rect">
             <a:avLst/>

--- a/src/outline2pptx/templates/warm.pptx
+++ b/src/outline2pptx/templates/warm.pptx
@@ -141,7 +141,8 @@
         <p:txBody>
           <a:bodyPr/>
           <a:lstStyle>
-            <a:lvl1pPr>
+            <a:lvl1pPr marL="0" indent="0">
+              <a:buNone/>
               <a:defRPr sz="4000"/>
             </a:lvl1pPr>
           </a:lstStyle>
@@ -173,7 +174,8 @@
         <p:txBody>
           <a:bodyPr/>
           <a:lstStyle>
-            <a:lvl1pPr>
+            <a:lvl1pPr marL="0" indent="0">
+              <a:buNone/>
               <a:defRPr sz="2000"/>
             </a:lvl1pPr>
           </a:lstStyle>
@@ -315,7 +317,8 @@
         <p:txBody>
           <a:bodyPr/>
           <a:lstStyle>
-            <a:lvl1pPr>
+            <a:lvl1pPr marL="0" indent="0">
+              <a:buNone/>
               <a:defRPr sz="4000"/>
             </a:lvl1pPr>
           </a:lstStyle>
@@ -347,7 +350,8 @@
         <p:txBody>
           <a:bodyPr/>
           <a:lstStyle>
-            <a:lvl1pPr>
+            <a:lvl1pPr marL="0" indent="0">
+              <a:buNone/>
               <a:defRPr sz="2000"/>
             </a:lvl1pPr>
           </a:lstStyle>
@@ -518,7 +522,8 @@
         <p:txBody>
           <a:bodyPr/>
           <a:lstStyle>
-            <a:lvl1pPr>
+            <a:lvl1pPr marL="0" indent="0">
+              <a:buNone/>
               <a:defRPr sz="3200"/>
             </a:lvl1pPr>
           </a:lstStyle>
@@ -721,7 +726,8 @@
         <p:txBody>
           <a:bodyPr anchor="t"/>
           <a:lstStyle>
-            <a:lvl1pPr>
+            <a:lvl1pPr marL="0" indent="0">
+              <a:buNone/>
               <a:defRPr sz="4000"/>
             </a:lvl1pPr>
           </a:lstStyle>
@@ -863,7 +869,8 @@
         <p:txBody>
           <a:bodyPr/>
           <a:lstStyle>
-            <a:lvl1pPr>
+            <a:lvl1pPr marL="0" indent="0">
+              <a:buNone/>
               <a:defRPr sz="3200"/>
             </a:lvl1pPr>
           </a:lstStyle>
@@ -1127,7 +1134,8 @@
         <p:txBody>
           <a:bodyPr/>
           <a:lstStyle>
-            <a:lvl1pPr>
+            <a:lvl1pPr marL="0" indent="0">
+              <a:buNone/>
               <a:defRPr sz="3200"/>
             </a:lvl1pPr>
           </a:lstStyle>
@@ -1159,7 +1167,8 @@
         <p:txBody>
           <a:bodyPr anchor="b"/>
           <a:lstStyle>
-            <a:lvl1pPr>
+            <a:lvl1pPr marL="0" indent="0">
+              <a:buNone/>
               <a:defRPr sz="2000"/>
             </a:lvl1pPr>
           </a:lstStyle>
@@ -1252,7 +1261,8 @@
         <p:txBody>
           <a:bodyPr anchor="b"/>
           <a:lstStyle>
-            <a:lvl1pPr>
+            <a:lvl1pPr marL="0" indent="0">
+              <a:buNone/>
               <a:defRPr sz="2000"/>
             </a:lvl1pPr>
           </a:lstStyle>
@@ -1455,7 +1465,8 @@
         <p:txBody>
           <a:bodyPr/>
           <a:lstStyle>
-            <a:lvl1pPr>
+            <a:lvl1pPr marL="0" indent="0">
+              <a:buNone/>
               <a:defRPr sz="4000"/>
             </a:lvl1pPr>
           </a:lstStyle>
@@ -1597,7 +1608,8 @@
         <p:txBody>
           <a:bodyPr anchor="b"/>
           <a:lstStyle>
-            <a:lvl1pPr>
+            <a:lvl1pPr marL="0" indent="0">
+              <a:buNone/>
               <a:defRPr sz="3200"/>
             </a:lvl1pPr>
           </a:lstStyle>
@@ -1800,7 +1812,8 @@
         <p:txBody>
           <a:bodyPr anchor="b"/>
           <a:lstStyle>
-            <a:lvl1pPr>
+            <a:lvl1pPr marL="0" indent="0">
+              <a:buNone/>
               <a:defRPr sz="3200"/>
             </a:lvl1pPr>
           </a:lstStyle>
@@ -1893,7 +1906,8 @@
         <p:txBody>
           <a:bodyPr/>
           <a:lstStyle>
-            <a:lvl1pPr>
+            <a:lvl1pPr marL="0" indent="0">
+              <a:buNone/>
               <a:defRPr sz="1800"/>
             </a:lvl1pPr>
           </a:lstStyle>
